--- a/ゲーム科1年/00_前期/ゲームエンジンⅠ/06_プレイヤーの移動.pptx
+++ b/ゲーム科1年/00_前期/ゲームエンジンⅠ/06_プレイヤーの移動.pptx
@@ -276,7 +276,7 @@
           <a:p>
             <a:fld id="{E9CC885B-4903-4D54-9A93-00025F12DED9}" type="datetimeFigureOut">
               <a:rPr kumimoji="1" lang="ja-JP" altLang="en-US" smtClean="0"/>
-              <a:t>2024/9/20</a:t>
+              <a:t>2025/3/3</a:t>
             </a:fld>
             <a:endParaRPr kumimoji="1" lang="ja-JP" altLang="en-US"/>
           </a:p>
@@ -506,7 +506,7 @@
           <a:p>
             <a:fld id="{E9CC885B-4903-4D54-9A93-00025F12DED9}" type="datetimeFigureOut">
               <a:rPr kumimoji="1" lang="ja-JP" altLang="en-US" smtClean="0"/>
-              <a:t>2024/9/20</a:t>
+              <a:t>2025/3/3</a:t>
             </a:fld>
             <a:endParaRPr kumimoji="1" lang="ja-JP" altLang="en-US"/>
           </a:p>
@@ -746,7 +746,7 @@
           <a:p>
             <a:fld id="{E9CC885B-4903-4D54-9A93-00025F12DED9}" type="datetimeFigureOut">
               <a:rPr kumimoji="1" lang="ja-JP" altLang="en-US" smtClean="0"/>
-              <a:t>2024/9/20</a:t>
+              <a:t>2025/3/3</a:t>
             </a:fld>
             <a:endParaRPr kumimoji="1" lang="ja-JP" altLang="en-US"/>
           </a:p>
@@ -976,7 +976,7 @@
           <a:p>
             <a:fld id="{E9CC885B-4903-4D54-9A93-00025F12DED9}" type="datetimeFigureOut">
               <a:rPr kumimoji="1" lang="ja-JP" altLang="en-US" smtClean="0"/>
-              <a:t>2024/9/20</a:t>
+              <a:t>2025/3/3</a:t>
             </a:fld>
             <a:endParaRPr kumimoji="1" lang="ja-JP" altLang="en-US"/>
           </a:p>
@@ -1251,7 +1251,7 @@
           <a:p>
             <a:fld id="{E9CC885B-4903-4D54-9A93-00025F12DED9}" type="datetimeFigureOut">
               <a:rPr kumimoji="1" lang="ja-JP" altLang="en-US" smtClean="0"/>
-              <a:t>2024/9/20</a:t>
+              <a:t>2025/3/3</a:t>
             </a:fld>
             <a:endParaRPr kumimoji="1" lang="ja-JP" altLang="en-US"/>
           </a:p>
@@ -1580,7 +1580,7 @@
           <a:p>
             <a:fld id="{E9CC885B-4903-4D54-9A93-00025F12DED9}" type="datetimeFigureOut">
               <a:rPr kumimoji="1" lang="ja-JP" altLang="en-US" smtClean="0"/>
-              <a:t>2024/9/20</a:t>
+              <a:t>2025/3/3</a:t>
             </a:fld>
             <a:endParaRPr kumimoji="1" lang="ja-JP" altLang="en-US"/>
           </a:p>
@@ -2056,7 +2056,7 @@
           <a:p>
             <a:fld id="{E9CC885B-4903-4D54-9A93-00025F12DED9}" type="datetimeFigureOut">
               <a:rPr kumimoji="1" lang="ja-JP" altLang="en-US" smtClean="0"/>
-              <a:t>2024/9/20</a:t>
+              <a:t>2025/3/3</a:t>
             </a:fld>
             <a:endParaRPr kumimoji="1" lang="ja-JP" altLang="en-US"/>
           </a:p>
@@ -2197,7 +2197,7 @@
           <a:p>
             <a:fld id="{E9CC885B-4903-4D54-9A93-00025F12DED9}" type="datetimeFigureOut">
               <a:rPr kumimoji="1" lang="ja-JP" altLang="en-US" smtClean="0"/>
-              <a:t>2024/9/20</a:t>
+              <a:t>2025/3/3</a:t>
             </a:fld>
             <a:endParaRPr kumimoji="1" lang="ja-JP" altLang="en-US"/>
           </a:p>
@@ -2310,7 +2310,7 @@
           <a:p>
             <a:fld id="{E9CC885B-4903-4D54-9A93-00025F12DED9}" type="datetimeFigureOut">
               <a:rPr kumimoji="1" lang="ja-JP" altLang="en-US" smtClean="0"/>
-              <a:t>2024/9/20</a:t>
+              <a:t>2025/3/3</a:t>
             </a:fld>
             <a:endParaRPr kumimoji="1" lang="ja-JP" altLang="en-US"/>
           </a:p>
@@ -2653,7 +2653,7 @@
           <a:p>
             <a:fld id="{E9CC885B-4903-4D54-9A93-00025F12DED9}" type="datetimeFigureOut">
               <a:rPr kumimoji="1" lang="ja-JP" altLang="en-US" smtClean="0"/>
-              <a:t>2024/9/20</a:t>
+              <a:t>2025/3/3</a:t>
             </a:fld>
             <a:endParaRPr kumimoji="1" lang="ja-JP" altLang="en-US"/>
           </a:p>
@@ -2941,7 +2941,7 @@
           <a:p>
             <a:fld id="{E9CC885B-4903-4D54-9A93-00025F12DED9}" type="datetimeFigureOut">
               <a:rPr kumimoji="1" lang="ja-JP" altLang="en-US" smtClean="0"/>
-              <a:t>2024/9/20</a:t>
+              <a:t>2025/3/3</a:t>
             </a:fld>
             <a:endParaRPr kumimoji="1" lang="ja-JP" altLang="en-US"/>
           </a:p>
@@ -3214,7 +3214,7 @@
           <a:p>
             <a:fld id="{E9CC885B-4903-4D54-9A93-00025F12DED9}" type="datetimeFigureOut">
               <a:rPr kumimoji="1" lang="ja-JP" altLang="en-US" smtClean="0"/>
-              <a:t>2024/9/20</a:t>
+              <a:t>2025/3/3</a:t>
             </a:fld>
             <a:endParaRPr kumimoji="1" lang="ja-JP" altLang="en-US"/>
           </a:p>
@@ -3681,7 +3681,7 @@
         <p:spPr>
           <a:xfrm>
             <a:off x="567542" y="1216429"/>
-            <a:ext cx="8494633" cy="1200329"/>
+            <a:ext cx="8494633" cy="2677656"/>
           </a:xfrm>
           <a:prstGeom prst="rect">
             <a:avLst/>
@@ -3711,6 +3711,46 @@
             <a:r>
               <a:rPr lang="ja-JP" altLang="en-US" sz="2400" dirty="0"/>
               <a:t>今回は初代バイオハザード移動を実装してみます。</a:t>
+            </a:r>
+            <a:endParaRPr lang="en-US" altLang="ja-JP" sz="2400" dirty="0"/>
+          </a:p>
+          <a:p>
+            <a:endParaRPr kumimoji="1" lang="en-US" altLang="ja-JP" sz="2400" dirty="0"/>
+          </a:p>
+          <a:p>
+            <a:r>
+              <a:rPr lang="ja-JP" altLang="en-US" sz="2400" b="1" dirty="0">
+                <a:solidFill>
+                  <a:srgbClr val="FF0000"/>
+                </a:solidFill>
+              </a:rPr>
+              <a:t>■操作方法</a:t>
+            </a:r>
+            <a:endParaRPr lang="en-US" altLang="ja-JP" sz="2400" b="1" dirty="0">
+              <a:solidFill>
+                <a:srgbClr val="FF0000"/>
+              </a:solidFill>
+            </a:endParaRPr>
+          </a:p>
+          <a:p>
+            <a:r>
+              <a:rPr kumimoji="1" lang="ja-JP" altLang="en-US" sz="2400" dirty="0"/>
+              <a:t>左右キー：</a:t>
+            </a:r>
+            <a:r>
+              <a:rPr kumimoji="1" lang="en-US" altLang="ja-JP" sz="2400" dirty="0"/>
+              <a:t>Y</a:t>
+            </a:r>
+            <a:r>
+              <a:rPr kumimoji="1" lang="ja-JP" altLang="en-US" sz="2400" dirty="0"/>
+              <a:t>軸回転</a:t>
+            </a:r>
+            <a:endParaRPr kumimoji="1" lang="en-US" altLang="ja-JP" sz="2400" dirty="0"/>
+          </a:p>
+          <a:p>
+            <a:r>
+              <a:rPr lang="ja-JP" altLang="en-US" sz="2400" dirty="0"/>
+              <a:t>上キー：前進</a:t>
             </a:r>
             <a:endParaRPr kumimoji="1" lang="en-US" altLang="ja-JP" sz="2400" dirty="0"/>
           </a:p>
@@ -5971,7 +6011,11 @@
               <a:t>オブジェクトの名前もわかりやすいように</a:t>
             </a:r>
             <a:r>
-              <a:rPr kumimoji="1" lang="en-US" altLang="ja-JP" sz="2400" dirty="0"/>
+              <a:rPr kumimoji="1" lang="en-US" altLang="ja-JP" sz="2400" b="1" dirty="0">
+                <a:solidFill>
+                  <a:srgbClr val="0070C0"/>
+                </a:solidFill>
+              </a:rPr>
               <a:t>Player</a:t>
             </a:r>
             <a:r>
@@ -6092,7 +6136,7 @@
         <p:spPr>
           <a:xfrm>
             <a:off x="567542" y="1216429"/>
-            <a:ext cx="7085594" cy="461665"/>
+            <a:ext cx="7231467" cy="461665"/>
           </a:xfrm>
           <a:prstGeom prst="rect">
             <a:avLst/>
@@ -6106,7 +6150,11 @@
           <a:lstStyle/>
           <a:p>
             <a:r>
-              <a:rPr lang="en-US" altLang="ja-JP" sz="2400" dirty="0"/>
+              <a:rPr lang="en-US" altLang="ja-JP" sz="2400" b="1" dirty="0">
+                <a:solidFill>
+                  <a:srgbClr val="0070C0"/>
+                </a:solidFill>
+              </a:rPr>
               <a:t>Player</a:t>
             </a:r>
             <a:r>
@@ -6114,7 +6162,11 @@
               <a:t>を選択して、</a:t>
             </a:r>
             <a:r>
-              <a:rPr lang="en-US" altLang="ja-JP" sz="2400" dirty="0" err="1"/>
+              <a:rPr lang="en-US" altLang="ja-JP" sz="2400" b="1" dirty="0" err="1">
+                <a:solidFill>
+                  <a:srgbClr val="00B050"/>
+                </a:solidFill>
+              </a:rPr>
               <a:t>Rigidbody</a:t>
             </a:r>
             <a:r>
@@ -6408,20 +6460,44 @@
           <a:lstStyle/>
           <a:p>
             <a:r>
-              <a:rPr lang="en-US" altLang="ja-JP" sz="2400" dirty="0"/>
+              <a:rPr lang="en-US" altLang="ja-JP" sz="2400" b="1" dirty="0">
+                <a:solidFill>
+                  <a:srgbClr val="0070C0"/>
+                </a:solidFill>
+              </a:rPr>
               <a:t>Player</a:t>
             </a:r>
             <a:r>
+              <a:rPr lang="ja-JP" altLang="en-US" sz="2400" b="1" dirty="0">
+                <a:solidFill>
+                  <a:srgbClr val="0070C0"/>
+                </a:solidFill>
+              </a:rPr>
+              <a:t>オブジェクト</a:t>
+            </a:r>
+            <a:r>
               <a:rPr lang="ja-JP" altLang="en-US" sz="2400" dirty="0"/>
-              <a:t>オブジェクトに</a:t>
-            </a:r>
-            <a:r>
-              <a:rPr lang="en-US" altLang="ja-JP" sz="2400" dirty="0"/>
+              <a:t>に</a:t>
+            </a:r>
+            <a:r>
+              <a:rPr lang="en-US" altLang="ja-JP" sz="2400" b="1" dirty="0">
+                <a:solidFill>
+                  <a:srgbClr val="00B050"/>
+                </a:solidFill>
+              </a:rPr>
               <a:t>Player</a:t>
             </a:r>
             <a:r>
+              <a:rPr lang="ja-JP" altLang="en-US" sz="2400" b="1" dirty="0">
+                <a:solidFill>
+                  <a:srgbClr val="00B050"/>
+                </a:solidFill>
+              </a:rPr>
+              <a:t>スクリプト</a:t>
+            </a:r>
+            <a:r>
               <a:rPr lang="ja-JP" altLang="en-US" sz="2400" dirty="0"/>
-              <a:t>スクリプトを追加しましょう。</a:t>
+              <a:t>を追加しましょう。</a:t>
             </a:r>
             <a:endParaRPr kumimoji="1" lang="en-US" altLang="ja-JP" sz="2400" dirty="0"/>
           </a:p>
@@ -6722,7 +6798,7 @@
         <p:spPr>
           <a:xfrm>
             <a:off x="567542" y="1216429"/>
-            <a:ext cx="11118749" cy="1569660"/>
+            <a:ext cx="11210120" cy="461665"/>
           </a:xfrm>
           <a:prstGeom prst="rect">
             <a:avLst/>
@@ -6734,35 +6810,6 @@
             <a:spAutoFit/>
           </a:bodyPr>
           <a:lstStyle/>
-          <a:p>
-            <a:r>
-              <a:rPr kumimoji="1" lang="en-US" altLang="ja-JP" sz="2400" dirty="0"/>
-              <a:t>Player</a:t>
-            </a:r>
-            <a:r>
-              <a:rPr kumimoji="1" lang="ja-JP" altLang="en-US" sz="2400" dirty="0"/>
-              <a:t>クラスはただのスクリプトなので、</a:t>
-            </a:r>
-            <a:endParaRPr kumimoji="1" lang="en-US" altLang="ja-JP" sz="2400" dirty="0"/>
-          </a:p>
-          <a:p>
-            <a:r>
-              <a:rPr lang="ja-JP" altLang="en-US" sz="2400" b="1" dirty="0">
-                <a:solidFill>
-                  <a:srgbClr val="FF0000"/>
-                </a:solidFill>
-              </a:rPr>
-              <a:t>他にどのようなコンポーネントがついているのかがわかりません。</a:t>
-            </a:r>
-            <a:endParaRPr lang="en-US" altLang="ja-JP" sz="2400" b="1" dirty="0">
-              <a:solidFill>
-                <a:srgbClr val="FF0000"/>
-              </a:solidFill>
-            </a:endParaRPr>
-          </a:p>
-          <a:p>
-            <a:endParaRPr kumimoji="1" lang="en-US" altLang="ja-JP" sz="2400" dirty="0"/>
-          </a:p>
           <a:p>
             <a:r>
               <a:rPr lang="ja-JP" altLang="en-US" sz="2400" dirty="0"/>
@@ -6814,7 +6861,7 @@
         </p:blipFill>
         <p:spPr>
           <a:xfrm>
-            <a:off x="567543" y="2925789"/>
+            <a:off x="567542" y="1817794"/>
             <a:ext cx="8701964" cy="2076495"/>
           </a:xfrm>
           <a:prstGeom prst="rect">
@@ -6836,7 +6883,7 @@
         </p:nvSpPr>
         <p:spPr>
           <a:xfrm>
-            <a:off x="567542" y="5141984"/>
+            <a:off x="567542" y="4033989"/>
             <a:ext cx="10786927" cy="830997"/>
           </a:xfrm>
           <a:prstGeom prst="rect">
